--- a/in_class_slides/geog4300_L12 Central limit theorem, CIs.pptx
+++ b/in_class_slides/geog4300_L12 Central limit theorem, CIs.pptx
@@ -7923,8 +7923,8 @@
           </a:p>
         </p:txBody>
       </p:sp>
-      <mc:AlternateContent xmlns:mc="http://schemas.openxmlformats.org/markup-compatibility/2006">
-        <mc:Choice xmlns:a14="http://schemas.microsoft.com/office/drawing/2010/main" Requires="a14">
+      <mc:AlternateContent xmlns:mc="http://schemas.openxmlformats.org/markup-compatibility/2006" xmlns:a14="http://schemas.microsoft.com/office/drawing/2010/main">
+        <mc:Choice Requires="a14">
           <p:sp>
             <p:nvSpPr>
               <p:cNvPr id="8" name="TextBox 7">
@@ -7956,7 +7956,10 @@
                 <a:pPr/>
                 <a14:m>
                   <m:oMathPara xmlns:m="http://schemas.openxmlformats.org/officeDocument/2006/math">
-                    <m:oMath>
+                    <m:oMathParaPr>
+                      <m:jc m:val="centerGroup"/>
+                    </m:oMathParaPr>
+                    <m:oMath xmlns:m="http://schemas.openxmlformats.org/officeDocument/2006/math">
                       <m:sSub>
                         <m:sSubPr>
                           <m:ctrlPr>
@@ -8055,7 +8058,7 @@
             </p:txBody>
           </p:sp>
         </mc:Choice>
-        <mc:Fallback>
+        <mc:Fallback xmlns="">
           <p:sp>
             <p:nvSpPr>
               <p:cNvPr id="8" name="TextBox 7">
@@ -8100,8 +8103,8 @@
           </p:sp>
         </mc:Fallback>
       </mc:AlternateContent>
-      <mc:AlternateContent xmlns:mc="http://schemas.openxmlformats.org/markup-compatibility/2006">
-        <mc:Choice xmlns:a14="http://schemas.microsoft.com/office/drawing/2010/main" Requires="a14">
+      <mc:AlternateContent xmlns:mc="http://schemas.openxmlformats.org/markup-compatibility/2006" xmlns:a14="http://schemas.microsoft.com/office/drawing/2010/main">
+        <mc:Choice Requires="a14">
           <p:sp>
             <p:nvSpPr>
               <p:cNvPr id="2" name="Rectangle 1">
@@ -8148,7 +8151,7 @@
             </p:txBody>
           </p:sp>
         </mc:Choice>
-        <mc:Fallback>
+        <mc:Fallback xmlns="">
           <p:sp>
             <p:nvSpPr>
               <p:cNvPr id="2" name="Rectangle 1">
@@ -8417,8 +8420,8 @@
           </a:p>
         </p:txBody>
       </p:sp>
-      <mc:AlternateContent xmlns:mc="http://schemas.openxmlformats.org/markup-compatibility/2006">
-        <mc:Choice xmlns:a14="http://schemas.microsoft.com/office/drawing/2010/main" Requires="a14">
+      <mc:AlternateContent xmlns:mc="http://schemas.openxmlformats.org/markup-compatibility/2006" xmlns:a14="http://schemas.microsoft.com/office/drawing/2010/main">
+        <mc:Choice Requires="a14">
           <p:sp>
             <p:nvSpPr>
               <p:cNvPr id="8" name="TextBox 7">
@@ -8450,7 +8453,10 @@
                 <a:pPr/>
                 <a14:m>
                   <m:oMathPara xmlns:m="http://schemas.openxmlformats.org/officeDocument/2006/math">
-                    <m:oMath>
+                    <m:oMathParaPr>
+                      <m:jc m:val="centerGroup"/>
+                    </m:oMathParaPr>
+                    <m:oMath xmlns:m="http://schemas.openxmlformats.org/officeDocument/2006/math">
                       <m:sSub>
                         <m:sSubPr>
                           <m:ctrlPr>
@@ -8549,7 +8555,7 @@
             </p:txBody>
           </p:sp>
         </mc:Choice>
-        <mc:Fallback>
+        <mc:Fallback xmlns="">
           <p:sp>
             <p:nvSpPr>
               <p:cNvPr id="8" name="TextBox 7">
@@ -8594,8 +8600,8 @@
           </p:sp>
         </mc:Fallback>
       </mc:AlternateContent>
-      <mc:AlternateContent xmlns:mc="http://schemas.openxmlformats.org/markup-compatibility/2006">
-        <mc:Choice xmlns:a14="http://schemas.microsoft.com/office/drawing/2010/main" Requires="a14">
+      <mc:AlternateContent xmlns:mc="http://schemas.openxmlformats.org/markup-compatibility/2006" xmlns:a14="http://schemas.microsoft.com/office/drawing/2010/main">
+        <mc:Choice Requires="a14">
           <p:sp>
             <p:nvSpPr>
               <p:cNvPr id="2" name="Rectangle 1">
@@ -8642,7 +8648,7 @@
             </p:txBody>
           </p:sp>
         </mc:Choice>
-        <mc:Fallback>
+        <mc:Fallback xmlns="">
           <p:sp>
             <p:nvSpPr>
               <p:cNvPr id="2" name="Rectangle 1">
@@ -9142,7 +9148,10 @@
                 <a:pPr/>
                 <a14:m>
                   <m:oMathPara xmlns:m="http://schemas.openxmlformats.org/officeDocument/2006/math">
-                    <m:oMath>
+                    <m:oMathParaPr>
+                      <m:jc m:val="centerGroup"/>
+                    </m:oMathParaPr>
+                    <m:oMath xmlns:m="http://schemas.openxmlformats.org/officeDocument/2006/math">
                       <m:sSub>
                         <m:sSubPr>
                           <m:ctrlPr>
@@ -10019,8 +10028,8 @@
           </a:p>
         </p:txBody>
       </p:sp>
-      <mc:AlternateContent xmlns:mc="http://schemas.openxmlformats.org/markup-compatibility/2006">
-        <mc:Choice xmlns:a14="http://schemas.microsoft.com/office/drawing/2010/main" Requires="a14">
+      <mc:AlternateContent xmlns:mc="http://schemas.openxmlformats.org/markup-compatibility/2006" xmlns:a14="http://schemas.microsoft.com/office/drawing/2010/main">
+        <mc:Choice Requires="a14">
           <p:sp>
             <p:nvSpPr>
               <p:cNvPr id="4" name="TextBox 3">
@@ -10052,7 +10061,10 @@
                 <a:pPr/>
                 <a14:m>
                   <m:oMathPara xmlns:m="http://schemas.openxmlformats.org/officeDocument/2006/math">
-                    <m:oMath>
+                    <m:oMathParaPr>
+                      <m:jc m:val="centerGroup"/>
+                    </m:oMathParaPr>
+                    <m:oMath xmlns:m="http://schemas.openxmlformats.org/officeDocument/2006/math">
                       <m:sSub>
                         <m:sSubPr>
                           <m:ctrlPr>
@@ -10140,7 +10152,7 @@
             </p:txBody>
           </p:sp>
         </mc:Choice>
-        <mc:Fallback>
+        <mc:Fallback xmlns="">
           <p:sp>
             <p:nvSpPr>
               <p:cNvPr id="4" name="TextBox 3">
@@ -10456,8 +10468,8 @@
           </a:p>
         </p:txBody>
       </p:sp>
-      <mc:AlternateContent xmlns:mc="http://schemas.openxmlformats.org/markup-compatibility/2006">
-        <mc:Choice xmlns:a14="http://schemas.microsoft.com/office/drawing/2010/main" Requires="a14">
+      <mc:AlternateContent xmlns:mc="http://schemas.openxmlformats.org/markup-compatibility/2006" xmlns:a14="http://schemas.microsoft.com/office/drawing/2010/main">
+        <mc:Choice Requires="a14">
           <p:sp>
             <p:nvSpPr>
               <p:cNvPr id="4" name="TextBox 3">
@@ -10489,7 +10501,10 @@
                 <a:pPr/>
                 <a14:m>
                   <m:oMathPara xmlns:m="http://schemas.openxmlformats.org/officeDocument/2006/math">
-                    <m:oMath>
+                    <m:oMathParaPr>
+                      <m:jc m:val="centerGroup"/>
+                    </m:oMathParaPr>
+                    <m:oMath xmlns:m="http://schemas.openxmlformats.org/officeDocument/2006/math">
                       <m:f>
                         <m:fPr>
                           <m:ctrlPr>
@@ -10529,7 +10544,7 @@
             </p:txBody>
           </p:sp>
         </mc:Choice>
-        <mc:Fallback>
+        <mc:Fallback xmlns="">
           <p:sp>
             <p:nvSpPr>
               <p:cNvPr id="4" name="TextBox 3">
@@ -11341,6 +11356,88 @@
                 <a:schemeClr val="bg1"/>
               </a:solidFill>
             </a:endParaRPr>
+          </a:p>
+        </p:txBody>
+      </p:sp>
+      <p:pic>
+        <p:nvPicPr>
+          <p:cNvPr id="1028" name="Picture 4" descr="Useful Mental Model: Normal Distribution - Scott H Young">
+            <a:extLst>
+              <a:ext uri="{FF2B5EF4-FFF2-40B4-BE49-F238E27FC236}">
+                <a16:creationId xmlns:a16="http://schemas.microsoft.com/office/drawing/2014/main" id="{11E5D2F3-8119-CC84-B6A5-9DC3353C37C9}"/>
+              </a:ext>
+            </a:extLst>
+          </p:cNvPr>
+          <p:cNvPicPr>
+            <a:picLocks noChangeAspect="1" noChangeArrowheads="1"/>
+          </p:cNvPicPr>
+          <p:nvPr/>
+        </p:nvPicPr>
+        <p:blipFill>
+          <a:blip r:embed="rId3">
+            <a:extLst>
+              <a:ext uri="{28A0092B-C50C-407E-A947-70E740481C1C}">
+                <a14:useLocalDpi xmlns:a14="http://schemas.microsoft.com/office/drawing/2010/main" val="0"/>
+              </a:ext>
+            </a:extLst>
+          </a:blip>
+          <a:srcRect/>
+          <a:stretch>
+            <a:fillRect/>
+          </a:stretch>
+        </p:blipFill>
+        <p:spPr bwMode="auto">
+          <a:xfrm>
+            <a:off x="4661901" y="552104"/>
+            <a:ext cx="6667500" cy="5753100"/>
+          </a:xfrm>
+          <a:prstGeom prst="rect">
+            <a:avLst/>
+          </a:prstGeom>
+          <a:noFill/>
+          <a:extLst>
+            <a:ext uri="{909E8E84-426E-40DD-AFC4-6F175D3DCCD1}">
+              <a14:hiddenFill xmlns:a14="http://schemas.microsoft.com/office/drawing/2010/main">
+                <a:solidFill>
+                  <a:srgbClr val="FFFFFF"/>
+                </a:solidFill>
+              </a14:hiddenFill>
+            </a:ext>
+          </a:extLst>
+        </p:spPr>
+      </p:pic>
+      <p:sp>
+        <p:nvSpPr>
+          <p:cNvPr id="5" name="TextBox 4">
+            <a:extLst>
+              <a:ext uri="{FF2B5EF4-FFF2-40B4-BE49-F238E27FC236}">
+                <a16:creationId xmlns:a16="http://schemas.microsoft.com/office/drawing/2014/main" id="{0517DBF0-FE49-082E-DAA3-92753560E3B0}"/>
+              </a:ext>
+            </a:extLst>
+          </p:cNvPr>
+          <p:cNvSpPr txBox="1"/>
+          <p:nvPr/>
+        </p:nvSpPr>
+        <p:spPr>
+          <a:xfrm>
+            <a:off x="6622931" y="6473240"/>
+            <a:ext cx="5084975" cy="276999"/>
+          </a:xfrm>
+          <a:prstGeom prst="rect">
+            <a:avLst/>
+          </a:prstGeom>
+          <a:noFill/>
+        </p:spPr>
+        <p:txBody>
+          <a:bodyPr wrap="square">
+            <a:spAutoFit/>
+          </a:bodyPr>
+          <a:lstStyle/>
+          <a:p>
+            <a:r>
+              <a:rPr lang="en-US" sz="1200" dirty="0"/>
+              <a:t>https://www.scotthyoung.com/blog/2019/07/17/normal-distribution/</a:t>
+            </a:r>
           </a:p>
         </p:txBody>
       </p:sp>
